--- a/docs/SafeScape_Review_Presentation.pptx
+++ b/docs/SafeScape_Review_Presentation.pptx
@@ -3329,7 +3329,7 @@
                 </a:solidFill>
                 <a:latin typeface="Segoe UI"/>
               </a:rPr>
-              <a:t>[Member 1 — full name]  ·  [Reg. no.]</a:t>
+              <a:t>Amruth Rohan KR  ·  Cb.en.u4ece23222</a:t>
             </a:r>
           </a:p>
           <a:p>
@@ -3367,7 +3367,7 @@
                 </a:solidFill>
                 <a:latin typeface="Segoe UI"/>
               </a:rPr>
-              <a:t>[Member 2 — full name]  ·  [Reg. no.]</a:t>
+              <a:t>Harish Venkat VS  ·  Cb.en.u4ece23219</a:t>
             </a:r>
           </a:p>
           <a:p>
@@ -3386,45 +3386,7 @@
                 </a:solidFill>
                 <a:latin typeface="Segoe UI"/>
               </a:rPr>
-              <a:t>    architecture: log-mel CRNN (champion)</a:t>
-            </a:r>
-          </a:p>
-          <a:p>
-            <a:pPr algn="l">
-              <a:spcBef>
-                <a:spcPts val="0"/>
-              </a:spcBef>
-              <a:spcAft>
-                <a:spcPts val="100"/>
-              </a:spcAft>
-            </a:pPr>
-            <a:r>
-              <a:rPr sz="1350" b="1" i="0">
-                <a:solidFill>
-                  <a:srgbClr val="1A1A2E"/>
-                </a:solidFill>
-                <a:latin typeface="Segoe UI"/>
-              </a:rPr>
-              <a:t>[Member 3 — full name]  ·  [Reg. no.]</a:t>
-            </a:r>
-          </a:p>
-          <a:p>
-            <a:pPr algn="l">
-              <a:spcBef>
-                <a:spcPts val="0"/>
-              </a:spcBef>
-              <a:spcAft>
-                <a:spcPts val="700"/>
-              </a:spcAft>
-            </a:pPr>
-            <a:r>
-              <a:rPr sz="1150" b="0" i="0">
-                <a:solidFill>
-                  <a:srgbClr val="5A5A72"/>
-                </a:solidFill>
-                <a:latin typeface="Segoe UI"/>
-              </a:rPr>
-              <a:t>    architecture: Distilled Tiny Transformer</a:t>
+              <a:t>    architecture: log-mel CRNN (champion), Distilled Tiny Transformer</a:t>
             </a:r>
           </a:p>
         </p:txBody>
@@ -3504,7 +3466,7 @@
                 </a:solidFill>
                 <a:latin typeface="Segoe UI"/>
               </a:rPr>
-              <a:t>Group No: [Group No.]</a:t>
+              <a:t>Group No: 1</a:t>
             </a:r>
           </a:p>
           <a:p>
@@ -3542,7 +3504,7 @@
                 </a:solidFill>
                 <a:latin typeface="Segoe UI"/>
               </a:rPr>
-              <a:t>[Course code — Neural Networks &amp; Deep Learning]</a:t>
+              <a:t>23CSE473 — Neural Networks and Deep Learning</a:t>
             </a:r>
           </a:p>
         </p:txBody>
@@ -13655,7 +13617,7 @@
                 </a:solidFill>
                 <a:latin typeface="Segoe UI"/>
               </a:rPr>
-              <a:t>[Member 1 — full name] · 5 journal papers (2025/2026, Scopus/SJR-indexed venues)</a:t>
+              <a:t>Amruth Rohan KR · 5 journal papers (2025/2026, Scopus/SJR-indexed venues)</a:t>
             </a:r>
           </a:p>
         </p:txBody>
@@ -14537,7 +14499,7 @@
                 </a:solidFill>
                 <a:latin typeface="Segoe UI"/>
               </a:rPr>
-              <a:t>[Member 2 — full name] · 5 journal papers (2025/2026, Scopus/SJR-indexed venues)</a:t>
+              <a:t>Harish Venkat VS · 5 journal papers (2025/2026, Scopus/SJR-indexed venues)</a:t>
             </a:r>
           </a:p>
         </p:txBody>
@@ -15419,7 +15381,7 @@
                 </a:solidFill>
                 <a:latin typeface="Segoe UI"/>
               </a:rPr>
-              <a:t>[Member 3 — full name] · 5 journal papers (2025/2026, Scopus/SJR-indexed venues)</a:t>
+              <a:t>Harish Venkat VS · 5 journal papers (2025/2026, Scopus/SJR-indexed venues)</a:t>
             </a:r>
           </a:p>
         </p:txBody>
